--- a/sample/graph5.pptx
+++ b/sample/graph5.pptx
@@ -649,8 +649,8 @@
         </p:nvSpPr>
         <p:spPr>
           <a:xfrm>
-            <a:off x="4939339" y="3602918"/>
-            <a:ext cx="429964" cy="270539"/>
+            <a:off x="4904973" y="3602918"/>
+            <a:ext cx="498697" cy="270539"/>
           </a:xfrm>
           <a:prstGeom prst="roundRect">
             <a:avLst/>
@@ -665,7 +665,7 @@
           </a:ln>
         </p:spPr>
         <p:txBody>
-          <a:bodyPr rtlCol="0" anchor="ctr" lIns="18288" tIns="9144" rIns="18288" bIns="9144"/>
+          <a:bodyPr rtlCol="0" anchor="ctr" wrap="none" lIns="0" tIns="0" rIns="0" bIns="0"/>
           <a:lstStyle/>
           <a:p>
             <a:pPr algn="ctr">
@@ -694,8 +694,8 @@
         </p:nvSpPr>
         <p:spPr>
           <a:xfrm>
-            <a:off x="6375282" y="1490813"/>
-            <a:ext cx="403846" cy="270539"/>
+            <a:off x="6342482" y="1490813"/>
+            <a:ext cx="469445" cy="270539"/>
           </a:xfrm>
           <a:prstGeom prst="roundRect">
             <a:avLst/>
@@ -710,7 +710,7 @@
           </a:ln>
         </p:spPr>
         <p:txBody>
-          <a:bodyPr rtlCol="0" anchor="ctr" lIns="18288" tIns="9144" rIns="18288" bIns="9144"/>
+          <a:bodyPr rtlCol="0" anchor="ctr" wrap="none" lIns="0" tIns="0" rIns="0" bIns="0"/>
           <a:lstStyle/>
           <a:p>
             <a:pPr algn="ctr">
@@ -739,8 +739,8 @@
         </p:nvSpPr>
         <p:spPr>
           <a:xfrm>
-            <a:off x="5782585" y="1578705"/>
-            <a:ext cx="370331" cy="270539"/>
+            <a:off x="5751797" y="1578705"/>
+            <a:ext cx="431907" cy="270539"/>
           </a:xfrm>
           <a:prstGeom prst="roundRect">
             <a:avLst/>
@@ -755,7 +755,7 @@
           </a:ln>
         </p:spPr>
         <p:txBody>
-          <a:bodyPr rtlCol="0" anchor="ctr" lIns="18288" tIns="9144" rIns="18288" bIns="9144"/>
+          <a:bodyPr rtlCol="0" anchor="ctr" wrap="none" lIns="0" tIns="0" rIns="0" bIns="0"/>
           <a:lstStyle/>
           <a:p>
             <a:pPr algn="ctr">
@@ -784,8 +784,8 @@
         </p:nvSpPr>
         <p:spPr>
           <a:xfrm>
-            <a:off x="5798815" y="5627131"/>
-            <a:ext cx="305413" cy="270539"/>
+            <a:off x="5771921" y="5627131"/>
+            <a:ext cx="359200" cy="270539"/>
           </a:xfrm>
           <a:prstGeom prst="roundRect">
             <a:avLst/>
@@ -800,7 +800,7 @@
           </a:ln>
         </p:spPr>
         <p:txBody>
-          <a:bodyPr rtlCol="0" anchor="ctr" lIns="18288" tIns="9144" rIns="18288" bIns="9144"/>
+          <a:bodyPr rtlCol="0" anchor="ctr" wrap="none" lIns="0" tIns="0" rIns="0" bIns="0"/>
           <a:lstStyle/>
           <a:p>
             <a:pPr algn="ctr">
@@ -829,8 +829,8 @@
         </p:nvSpPr>
         <p:spPr>
           <a:xfrm>
-            <a:off x="6391072" y="5627131"/>
-            <a:ext cx="738699" cy="270539"/>
+            <a:off x="6338181" y="5627131"/>
+            <a:ext cx="844480" cy="270539"/>
           </a:xfrm>
           <a:prstGeom prst="roundRect">
             <a:avLst/>
@@ -845,7 +845,7 @@
           </a:ln>
         </p:spPr>
         <p:txBody>
-          <a:bodyPr rtlCol="0" anchor="ctr" lIns="18288" tIns="9144" rIns="18288" bIns="9144"/>
+          <a:bodyPr rtlCol="0" anchor="ctr" wrap="none" lIns="0" tIns="0" rIns="0" bIns="0"/>
           <a:lstStyle/>
           <a:p>
             <a:pPr algn="ctr">

--- a/sample/graph5.pptx
+++ b/sample/graph5.pptx
@@ -649,8 +649,8 @@
         </p:nvSpPr>
         <p:spPr>
           <a:xfrm>
-            <a:off x="4904973" y="3602918"/>
-            <a:ext cx="498697" cy="270539"/>
+            <a:off x="4903544" y="3588283"/>
+            <a:ext cx="501555" cy="299810"/>
           </a:xfrm>
           <a:prstGeom prst="roundRect">
             <a:avLst/>
@@ -694,8 +694,8 @@
         </p:nvSpPr>
         <p:spPr>
           <a:xfrm>
-            <a:off x="6342482" y="1490813"/>
-            <a:ext cx="469445" cy="270539"/>
+            <a:off x="6341053" y="1476177"/>
+            <a:ext cx="472302" cy="299810"/>
           </a:xfrm>
           <a:prstGeom prst="roundRect">
             <a:avLst/>
@@ -739,8 +739,8 @@
         </p:nvSpPr>
         <p:spPr>
           <a:xfrm>
-            <a:off x="5751797" y="1578705"/>
-            <a:ext cx="431907" cy="270539"/>
+            <a:off x="5750368" y="1564070"/>
+            <a:ext cx="434765" cy="299810"/>
           </a:xfrm>
           <a:prstGeom prst="roundRect">
             <a:avLst/>
@@ -784,8 +784,8 @@
         </p:nvSpPr>
         <p:spPr>
           <a:xfrm>
-            <a:off x="5771921" y="5627131"/>
-            <a:ext cx="359200" cy="270539"/>
+            <a:off x="5770492" y="5612496"/>
+            <a:ext cx="362058" cy="299810"/>
           </a:xfrm>
           <a:prstGeom prst="roundRect">
             <a:avLst/>
@@ -829,8 +829,8 @@
         </p:nvSpPr>
         <p:spPr>
           <a:xfrm>
-            <a:off x="6338181" y="5627131"/>
-            <a:ext cx="844480" cy="270539"/>
+            <a:off x="6336753" y="5612496"/>
+            <a:ext cx="847337" cy="299810"/>
           </a:xfrm>
           <a:prstGeom prst="roundRect">
             <a:avLst/>

--- a/sample/graph5.pptx
+++ b/sample/graph5.pptx
@@ -111,7 +111,7 @@
           </a:ln>
         </p:spPr>
         <p:txBody>
-          <a:bodyPr rtlCol="0" anchor="t" lIns="18288" tIns="9144" rIns="18288" bIns="9144"/>
+          <a:bodyPr rtlCol="0" anchor="t" wrap="none" lIns="18288" tIns="9144" rIns="18288" bIns="9144"/>
           <a:lstStyle/>
           <a:p>
             <a:pPr algn="ctr">
@@ -182,7 +182,7 @@
           </a:ln>
         </p:spPr>
         <p:txBody>
-          <a:bodyPr rtlCol="0" anchor="ctr" lIns="18288" tIns="9144" rIns="18288" bIns="9144"/>
+          <a:bodyPr rtlCol="0" anchor="ctr" wrap="none" lIns="18288" tIns="9144" rIns="18288" bIns="9144"/>
           <a:lstStyle/>
           <a:p>
             <a:pPr algn="ctr">
@@ -229,7 +229,7 @@
           </a:ln>
         </p:spPr>
         <p:txBody>
-          <a:bodyPr rtlCol="0" anchor="ctr" lIns="18288" tIns="9144" rIns="18288" bIns="9144"/>
+          <a:bodyPr rtlCol="0" anchor="ctr" wrap="none" lIns="18288" tIns="9144" rIns="18288" bIns="9144"/>
           <a:lstStyle/>
           <a:p>
             <a:pPr algn="ctr">
@@ -276,7 +276,7 @@
           </a:ln>
         </p:spPr>
         <p:txBody>
-          <a:bodyPr rtlCol="0" anchor="ctr" lIns="18288" tIns="9144" rIns="18288" bIns="9144"/>
+          <a:bodyPr rtlCol="0" anchor="ctr" wrap="none" lIns="18288" tIns="9144" rIns="18288" bIns="9144"/>
           <a:lstStyle/>
           <a:p>
             <a:pPr algn="ctr">
@@ -323,7 +323,7 @@
           </a:ln>
         </p:spPr>
         <p:txBody>
-          <a:bodyPr rtlCol="0" anchor="ctr" lIns="18288" tIns="9144" rIns="18288" bIns="9144"/>
+          <a:bodyPr rtlCol="0" anchor="ctr" wrap="none" lIns="18288" tIns="9144" rIns="18288" bIns="9144"/>
           <a:lstStyle/>
           <a:p>
             <a:pPr algn="ctr">
@@ -370,7 +370,7 @@
           </a:ln>
         </p:spPr>
         <p:txBody>
-          <a:bodyPr rtlCol="0" anchor="ctr" lIns="18288" tIns="9144" rIns="18288" bIns="9144"/>
+          <a:bodyPr rtlCol="0" anchor="ctr" wrap="none" lIns="18288" tIns="9144" rIns="18288" bIns="9144"/>
           <a:lstStyle/>
           <a:p>
             <a:pPr algn="ctr">
